--- a/tests/benchmark/architectural_slides/case_010_construction_phases/output.pptx
+++ b/tests/benchmark/architectural_slides/case_010_construction_phases/output.pptx
@@ -910,7 +910,7 @@
         <p:spPr>
           <a:xfrm>
             <a:off x="640080" y="411480"/>
-            <a:ext cx="7863840" cy="411480"/>
+            <a:ext cx="7863840" cy="601218"/>
           </a:xfrm>
           <a:prstGeom prst="rect">
             <a:avLst/>
@@ -948,8 +948,8 @@
         </p:nvSpPr>
         <p:spPr>
           <a:xfrm>
-            <a:off x="640080" y="861060"/>
-            <a:ext cx="7863840" cy="292608"/>
+            <a:off x="640080" y="1050798"/>
+            <a:ext cx="7863840" cy="326898"/>
           </a:xfrm>
           <a:prstGeom prst="rect">
             <a:avLst/>
@@ -987,8 +987,8 @@
         </p:nvSpPr>
         <p:spPr>
           <a:xfrm>
-            <a:off x="640080" y="1229868"/>
-            <a:ext cx="1880235" cy="1386383"/>
+            <a:off x="640080" y="1453896"/>
+            <a:ext cx="1880235" cy="1263167"/>
           </a:xfrm>
           <a:prstGeom prst="rect">
             <a:avLst/>
@@ -1012,7 +1012,7 @@
         </p:nvSpPr>
         <p:spPr>
           <a:xfrm>
-            <a:off x="777240" y="1740179"/>
+            <a:off x="777240" y="1902600"/>
             <a:ext cx="1605915" cy="365760"/>
           </a:xfrm>
           <a:prstGeom prst="rect">
@@ -1051,8 +1051,8 @@
         </p:nvSpPr>
         <p:spPr>
           <a:xfrm>
-            <a:off x="640080" y="2654351"/>
-            <a:ext cx="1880235" cy="1134313"/>
+            <a:off x="640080" y="2755163"/>
+            <a:ext cx="1880235" cy="1033501"/>
           </a:xfrm>
           <a:prstGeom prst="rect">
             <a:avLst/>
@@ -1090,7 +1090,7 @@
         </p:nvSpPr>
         <p:spPr>
           <a:xfrm>
-            <a:off x="2520315" y="2125447"/>
+            <a:off x="2520315" y="2271065"/>
             <a:ext cx="114300" cy="256032"/>
           </a:xfrm>
           <a:prstGeom prst="rect">
@@ -1115,8 +1115,8 @@
         </p:nvSpPr>
         <p:spPr>
           <a:xfrm>
-            <a:off x="2634615" y="1229868"/>
-            <a:ext cx="1880235" cy="1386383"/>
+            <a:off x="2634615" y="1453896"/>
+            <a:ext cx="1880235" cy="1263167"/>
           </a:xfrm>
           <a:prstGeom prst="rect">
             <a:avLst/>
@@ -1140,7 +1140,7 @@
         </p:nvSpPr>
         <p:spPr>
           <a:xfrm>
-            <a:off x="2771775" y="1740179"/>
+            <a:off x="2771775" y="1902600"/>
             <a:ext cx="1605915" cy="365760"/>
           </a:xfrm>
           <a:prstGeom prst="rect">
@@ -1179,8 +1179,8 @@
         </p:nvSpPr>
         <p:spPr>
           <a:xfrm>
-            <a:off x="2634615" y="2654351"/>
-            <a:ext cx="1880235" cy="1134313"/>
+            <a:off x="2634615" y="2755163"/>
+            <a:ext cx="1880235" cy="1033501"/>
           </a:xfrm>
           <a:prstGeom prst="rect">
             <a:avLst/>
@@ -1218,7 +1218,7 @@
         </p:nvSpPr>
         <p:spPr>
           <a:xfrm>
-            <a:off x="4514850" y="2125447"/>
+            <a:off x="4514850" y="2271065"/>
             <a:ext cx="114300" cy="256032"/>
           </a:xfrm>
           <a:prstGeom prst="rect">
@@ -1243,8 +1243,8 @@
         </p:nvSpPr>
         <p:spPr>
           <a:xfrm>
-            <a:off x="4629150" y="1229868"/>
-            <a:ext cx="1880235" cy="1386383"/>
+            <a:off x="4629150" y="1453896"/>
+            <a:ext cx="1880235" cy="1263167"/>
           </a:xfrm>
           <a:prstGeom prst="rect">
             <a:avLst/>
@@ -1268,7 +1268,7 @@
         </p:nvSpPr>
         <p:spPr>
           <a:xfrm>
-            <a:off x="4766310" y="1740179"/>
+            <a:off x="4766310" y="1902600"/>
             <a:ext cx="1605915" cy="365760"/>
           </a:xfrm>
           <a:prstGeom prst="rect">
@@ -1307,8 +1307,8 @@
         </p:nvSpPr>
         <p:spPr>
           <a:xfrm>
-            <a:off x="4629150" y="2654351"/>
-            <a:ext cx="1880235" cy="1134313"/>
+            <a:off x="4629150" y="2755163"/>
+            <a:ext cx="1880235" cy="1033501"/>
           </a:xfrm>
           <a:prstGeom prst="rect">
             <a:avLst/>
@@ -1346,7 +1346,7 @@
         </p:nvSpPr>
         <p:spPr>
           <a:xfrm>
-            <a:off x="6509385" y="2125447"/>
+            <a:off x="6509385" y="2271065"/>
             <a:ext cx="114300" cy="256032"/>
           </a:xfrm>
           <a:prstGeom prst="rect">
@@ -1371,8 +1371,8 @@
         </p:nvSpPr>
         <p:spPr>
           <a:xfrm>
-            <a:off x="6623685" y="1229868"/>
-            <a:ext cx="1880235" cy="2558796"/>
+            <a:off x="6623685" y="1453896"/>
+            <a:ext cx="1880235" cy="2334768"/>
           </a:xfrm>
           <a:prstGeom prst="rect">
             <a:avLst/>

--- a/tests/benchmark/architectural_slides/case_010_construction_phases/output.pptx
+++ b/tests/benchmark/architectural_slides/case_010_construction_phases/output.pptx
@@ -979,12 +979,19 @@
           </a:p>
         </p:txBody>
       </p:sp>
-      <p:sp>
-        <p:nvSpPr>
-          <p:cNvPr id="4" name="Shape 2"/>
-          <p:cNvSpPr/>
+      <p:pic>
+        <p:nvPicPr>
+          <p:cNvPr id="4" name="Image 0" descr="C:\Users\navib\Desktop\development\Archium-Agent\tests\benchmark\architectural_slides\case_010_construction_phases\assets\c0100001-0001-4001-8001-000000000001.png">    </p:cNvPr>
+          <p:cNvPicPr>
+            <a:picLocks noChangeAspect="1"/>
+          </p:cNvPicPr>
           <p:nvPr/>
-        </p:nvSpPr>
+        </p:nvPicPr>
+        <p:blipFill>
+          <a:blip r:embed="rId1"/>
+          <a:srcRect l="0" r="0" t="0" b="0"/>
+          <a:stretch/>
+        </p:blipFill>
         <p:spPr>
           <a:xfrm>
             <a:off x="640080" y="1453896"/>
@@ -993,59 +1000,11 @@
           <a:prstGeom prst="rect">
             <a:avLst/>
           </a:prstGeom>
-          <a:solidFill>
-            <a:srgbClr val="FFFFFF"/>
-          </a:solidFill>
-          <a:ln w="19050">
-            <a:solidFill>
-              <a:srgbClr val="C47B2B"/>
-            </a:solidFill>
-            <a:prstDash val="dash"/>
-          </a:ln>
-        </p:spPr>
-      </p:sp>
-      <p:sp>
-        <p:nvSpPr>
-          <p:cNvPr id="5" name="Text 3"/>
-          <p:cNvSpPr/>
-          <p:nvPr/>
-        </p:nvSpPr>
-        <p:spPr>
-          <a:xfrm>
-            <a:off x="777240" y="1902600"/>
-            <a:ext cx="1605915" cy="365760"/>
-          </a:xfrm>
-          <a:prstGeom prst="rect">
-            <a:avLst/>
-          </a:prstGeom>
-          <a:noFill/>
-          <a:ln/>
-        </p:spPr>
-        <p:txBody>
-          <a:bodyPr wrap="square" rtlCol="0" anchor="ctr"/>
-          <a:lstStyle/>
-          <a:p>
-            <a:pPr algn="ctr" indent="0" marL="0">
-              <a:buNone/>
-            </a:pPr>
-            <a:r>
-              <a:rPr lang="en-US" sz="1200" dirty="0">
-                <a:solidFill>
-                  <a:srgbClr val="777777"/>
-                </a:solidFill>
-                <a:latin typeface="Microsoft YaHei" pitchFamily="34" charset="0"/>
-                <a:ea typeface="Microsoft YaHei" pitchFamily="34" charset="-122"/>
-                <a:cs typeface="Microsoft YaHei" pitchFamily="34" charset="-120"/>
-              </a:rPr>
-              <a:t>素材缺失/路径未解析</a:t>
-            </a:r>
-            <a:endParaRPr lang="en-US" sz="1200" dirty="0"/>
-          </a:p>
-        </p:txBody>
-      </p:sp>
-      <p:sp>
-        <p:nvSpPr>
-          <p:cNvPr id="6" name="Text 4"/>
+        </p:spPr>
+      </p:pic>
+      <p:sp>
+        <p:nvSpPr>
+          <p:cNvPr id="5" name="Text 2"/>
           <p:cNvSpPr/>
           <p:nvPr/>
         </p:nvSpPr>
@@ -1084,7 +1043,7 @@
       </p:sp>
       <p:sp>
         <p:nvSpPr>
-          <p:cNvPr id="7" name="Shape 5"/>
+          <p:cNvPr id="6" name="Shape 3"/>
           <p:cNvSpPr/>
           <p:nvPr/>
         </p:nvSpPr>
@@ -1107,12 +1066,19 @@
           </a:ln>
         </p:spPr>
       </p:sp>
-      <p:sp>
-        <p:nvSpPr>
-          <p:cNvPr id="8" name="Shape 6"/>
-          <p:cNvSpPr/>
+      <p:pic>
+        <p:nvPicPr>
+          <p:cNvPr id="7" name="Image 1" descr="C:\Users\navib\Desktop\development\Archium-Agent\tests\benchmark\architectural_slides\case_010_construction_phases\assets\c0100002-0001-4001-8001-000000000002.png">    </p:cNvPr>
+          <p:cNvPicPr>
+            <a:picLocks noChangeAspect="1"/>
+          </p:cNvPicPr>
           <p:nvPr/>
-        </p:nvSpPr>
+        </p:nvPicPr>
+        <p:blipFill>
+          <a:blip r:embed="rId2"/>
+          <a:srcRect l="0" r="0" t="0" b="0"/>
+          <a:stretch/>
+        </p:blipFill>
         <p:spPr>
           <a:xfrm>
             <a:off x="2634615" y="1453896"/>
@@ -1121,59 +1087,11 @@
           <a:prstGeom prst="rect">
             <a:avLst/>
           </a:prstGeom>
-          <a:solidFill>
-            <a:srgbClr val="FFFFFF"/>
-          </a:solidFill>
-          <a:ln w="19050">
-            <a:solidFill>
-              <a:srgbClr val="C47B2B"/>
-            </a:solidFill>
-            <a:prstDash val="dash"/>
-          </a:ln>
-        </p:spPr>
-      </p:sp>
-      <p:sp>
-        <p:nvSpPr>
-          <p:cNvPr id="9" name="Text 7"/>
-          <p:cNvSpPr/>
-          <p:nvPr/>
-        </p:nvSpPr>
-        <p:spPr>
-          <a:xfrm>
-            <a:off x="2771775" y="1902600"/>
-            <a:ext cx="1605915" cy="365760"/>
-          </a:xfrm>
-          <a:prstGeom prst="rect">
-            <a:avLst/>
-          </a:prstGeom>
-          <a:noFill/>
-          <a:ln/>
-        </p:spPr>
-        <p:txBody>
-          <a:bodyPr wrap="square" rtlCol="0" anchor="ctr"/>
-          <a:lstStyle/>
-          <a:p>
-            <a:pPr algn="ctr" indent="0" marL="0">
-              <a:buNone/>
-            </a:pPr>
-            <a:r>
-              <a:rPr lang="en-US" sz="1200" dirty="0">
-                <a:solidFill>
-                  <a:srgbClr val="777777"/>
-                </a:solidFill>
-                <a:latin typeface="Microsoft YaHei" pitchFamily="34" charset="0"/>
-                <a:ea typeface="Microsoft YaHei" pitchFamily="34" charset="-122"/>
-                <a:cs typeface="Microsoft YaHei" pitchFamily="34" charset="-120"/>
-              </a:rPr>
-              <a:t>素材缺失/路径未解析</a:t>
-            </a:r>
-            <a:endParaRPr lang="en-US" sz="1200" dirty="0"/>
-          </a:p>
-        </p:txBody>
-      </p:sp>
-      <p:sp>
-        <p:nvSpPr>
-          <p:cNvPr id="10" name="Text 8"/>
+        </p:spPr>
+      </p:pic>
+      <p:sp>
+        <p:nvSpPr>
+          <p:cNvPr id="8" name="Text 4"/>
           <p:cNvSpPr/>
           <p:nvPr/>
         </p:nvSpPr>
@@ -1212,7 +1130,7 @@
       </p:sp>
       <p:sp>
         <p:nvSpPr>
-          <p:cNvPr id="11" name="Shape 9"/>
+          <p:cNvPr id="9" name="Shape 5"/>
           <p:cNvSpPr/>
           <p:nvPr/>
         </p:nvSpPr>
@@ -1235,12 +1153,19 @@
           </a:ln>
         </p:spPr>
       </p:sp>
-      <p:sp>
-        <p:nvSpPr>
-          <p:cNvPr id="12" name="Shape 10"/>
-          <p:cNvSpPr/>
+      <p:pic>
+        <p:nvPicPr>
+          <p:cNvPr id="10" name="Image 2" descr="C:\Users\navib\Desktop\development\Archium-Agent\tests\benchmark\architectural_slides\case_010_construction_phases\assets\c0100003-0001-4001-8001-000000000003.png">    </p:cNvPr>
+          <p:cNvPicPr>
+            <a:picLocks noChangeAspect="1"/>
+          </p:cNvPicPr>
           <p:nvPr/>
-        </p:nvSpPr>
+        </p:nvPicPr>
+        <p:blipFill>
+          <a:blip r:embed="rId3"/>
+          <a:srcRect l="0" r="0" t="0" b="0"/>
+          <a:stretch/>
+        </p:blipFill>
         <p:spPr>
           <a:xfrm>
             <a:off x="4629150" y="1453896"/>
@@ -1249,59 +1174,11 @@
           <a:prstGeom prst="rect">
             <a:avLst/>
           </a:prstGeom>
-          <a:solidFill>
-            <a:srgbClr val="FFFFFF"/>
-          </a:solidFill>
-          <a:ln w="19050">
-            <a:solidFill>
-              <a:srgbClr val="C47B2B"/>
-            </a:solidFill>
-            <a:prstDash val="dash"/>
-          </a:ln>
-        </p:spPr>
-      </p:sp>
-      <p:sp>
-        <p:nvSpPr>
-          <p:cNvPr id="13" name="Text 11"/>
-          <p:cNvSpPr/>
-          <p:nvPr/>
-        </p:nvSpPr>
-        <p:spPr>
-          <a:xfrm>
-            <a:off x="4766310" y="1902600"/>
-            <a:ext cx="1605915" cy="365760"/>
-          </a:xfrm>
-          <a:prstGeom prst="rect">
-            <a:avLst/>
-          </a:prstGeom>
-          <a:noFill/>
-          <a:ln/>
-        </p:spPr>
-        <p:txBody>
-          <a:bodyPr wrap="square" rtlCol="0" anchor="ctr"/>
-          <a:lstStyle/>
-          <a:p>
-            <a:pPr algn="ctr" indent="0" marL="0">
-              <a:buNone/>
-            </a:pPr>
-            <a:r>
-              <a:rPr lang="en-US" sz="1200" dirty="0">
-                <a:solidFill>
-                  <a:srgbClr val="777777"/>
-                </a:solidFill>
-                <a:latin typeface="Microsoft YaHei" pitchFamily="34" charset="0"/>
-                <a:ea typeface="Microsoft YaHei" pitchFamily="34" charset="-122"/>
-                <a:cs typeface="Microsoft YaHei" pitchFamily="34" charset="-120"/>
-              </a:rPr>
-              <a:t>素材缺失/路径未解析</a:t>
-            </a:r>
-            <a:endParaRPr lang="en-US" sz="1200" dirty="0"/>
-          </a:p>
-        </p:txBody>
-      </p:sp>
-      <p:sp>
-        <p:nvSpPr>
-          <p:cNvPr id="14" name="Text 12"/>
+        </p:spPr>
+      </p:pic>
+      <p:sp>
+        <p:nvSpPr>
+          <p:cNvPr id="11" name="Text 6"/>
           <p:cNvSpPr/>
           <p:nvPr/>
         </p:nvSpPr>
@@ -1340,7 +1217,7 @@
       </p:sp>
       <p:sp>
         <p:nvSpPr>
-          <p:cNvPr id="15" name="Shape 13"/>
+          <p:cNvPr id="12" name="Shape 7"/>
           <p:cNvSpPr/>
           <p:nvPr/>
         </p:nvSpPr>
@@ -1365,7 +1242,7 @@
       </p:sp>
       <p:sp>
         <p:nvSpPr>
-          <p:cNvPr id="16" name="Text 14"/>
+          <p:cNvPr id="13" name="Text 8"/>
           <p:cNvSpPr/>
           <p:nvPr/>
         </p:nvSpPr>
@@ -1404,7 +1281,7 @@
       </p:sp>
       <p:sp>
         <p:nvSpPr>
-          <p:cNvPr id="17" name="Text 15"/>
+          <p:cNvPr id="14" name="Text 9"/>
           <p:cNvSpPr/>
           <p:nvPr/>
         </p:nvSpPr>
@@ -1443,7 +1320,7 @@
       </p:sp>
       <p:sp>
         <p:nvSpPr>
-          <p:cNvPr id="18" name="Text 16"/>
+          <p:cNvPr id="15" name="Text 10"/>
           <p:cNvSpPr/>
           <p:nvPr/>
         </p:nvSpPr>

--- a/tests/benchmark/architectural_slides/case_010_construction_phases/output.pptx
+++ b/tests/benchmark/architectural_slides/case_010_construction_phases/output.pptx
@@ -1060,7 +1060,7 @@
           </a:solidFill>
           <a:ln w="12700">
             <a:solidFill>
-              <a:srgbClr val="333333"/>
+              <a:srgbClr val="D9D5CF"/>
             </a:solidFill>
             <a:prstDash val="solid"/>
           </a:ln>
@@ -1147,7 +1147,7 @@
           </a:solidFill>
           <a:ln w="12700">
             <a:solidFill>
-              <a:srgbClr val="333333"/>
+              <a:srgbClr val="D9D5CF"/>
             </a:solidFill>
             <a:prstDash val="solid"/>
           </a:ln>
@@ -1234,7 +1234,7 @@
           </a:solidFill>
           <a:ln w="12700">
             <a:solidFill>
-              <a:srgbClr val="333333"/>
+              <a:srgbClr val="D9D5CF"/>
             </a:solidFill>
             <a:prstDash val="solid"/>
           </a:ln>

--- a/tests/benchmark/architectural_slides/case_010_construction_phases/output.pptx
+++ b/tests/benchmark/architectural_slides/case_010_construction_phases/output.pptx
@@ -910,7 +910,7 @@
         <p:spPr>
           <a:xfrm>
             <a:off x="640080" y="411480"/>
-            <a:ext cx="7863840" cy="601218"/>
+            <a:ext cx="7863840" cy="621792"/>
           </a:xfrm>
           <a:prstGeom prst="rect">
             <a:avLst/>
@@ -948,7 +948,7 @@
         </p:nvSpPr>
         <p:spPr>
           <a:xfrm>
-            <a:off x="640080" y="1050798"/>
+            <a:off x="640080" y="1071372"/>
             <a:ext cx="7863840" cy="326898"/>
           </a:xfrm>
           <a:prstGeom prst="rect">
@@ -979,9 +979,34 @@
           </a:p>
         </p:txBody>
       </p:sp>
+      <p:sp>
+        <p:nvSpPr>
+          <p:cNvPr id="4" name="Shape 2"/>
+          <p:cNvSpPr/>
+          <p:nvPr/>
+        </p:nvSpPr>
+        <p:spPr>
+          <a:xfrm>
+            <a:off x="1580198" y="1752173"/>
+            <a:ext cx="5983605" cy="32004"/>
+          </a:xfrm>
+          <a:prstGeom prst="rect">
+            <a:avLst/>
+          </a:prstGeom>
+          <a:solidFill>
+            <a:srgbClr val="D9D5CF"/>
+          </a:solidFill>
+          <a:ln w="12700">
+            <a:solidFill>
+              <a:srgbClr val="D9D5CF"/>
+            </a:solidFill>
+            <a:prstDash val="solid"/>
+          </a:ln>
+        </p:spPr>
+      </p:sp>
       <p:pic>
         <p:nvPicPr>
-          <p:cNvPr id="4" name="Image 0" descr="C:\Users\navib\Desktop\development\Archium-Agent\tests\benchmark\architectural_slides\case_010_construction_phases\assets\c0100001-0001-4001-8001-000000000001.png">    </p:cNvPr>
+          <p:cNvPr id="5" name="Image 0" descr="C:\Users\navib\Desktop\development\Archium-Agent\tests\benchmark\architectural_slides\case_010_construction_phases\assets\c0100001-0001-4001-8001-000000000001.png">    </p:cNvPr>
           <p:cNvPicPr>
             <a:picLocks noChangeAspect="1"/>
           </p:cNvPicPr>
@@ -994,8 +1019,8 @@
         </p:blipFill>
         <p:spPr>
           <a:xfrm>
-            <a:off x="640080" y="1453896"/>
-            <a:ext cx="1880235" cy="1263167"/>
+            <a:off x="640080" y="1474470"/>
+            <a:ext cx="1880235" cy="1251852"/>
           </a:xfrm>
           <a:prstGeom prst="rect">
             <a:avLst/>
@@ -1004,14 +1029,263 @@
       </p:pic>
       <p:sp>
         <p:nvSpPr>
-          <p:cNvPr id="5" name="Text 2"/>
+          <p:cNvPr id="6" name="Shape 3"/>
           <p:cNvSpPr/>
           <p:nvPr/>
         </p:nvSpPr>
         <p:spPr>
           <a:xfrm>
-            <a:off x="640080" y="2755163"/>
-            <a:ext cx="1880235" cy="1033501"/>
+            <a:off x="2520315" y="2284438"/>
+            <a:ext cx="114300" cy="256032"/>
+          </a:xfrm>
+          <a:prstGeom prst="rect">
+            <a:avLst/>
+          </a:prstGeom>
+          <a:solidFill>
+            <a:srgbClr val="FFFFFF"/>
+          </a:solidFill>
+          <a:ln w="12700">
+            <a:solidFill>
+              <a:srgbClr val="D9D5CF"/>
+            </a:solidFill>
+            <a:prstDash val="solid"/>
+          </a:ln>
+        </p:spPr>
+      </p:sp>
+      <p:pic>
+        <p:nvPicPr>
+          <p:cNvPr id="7" name="Image 1" descr="C:\Users\navib\Desktop\development\Archium-Agent\tests\benchmark\architectural_slides\case_010_construction_phases\assets\c0100002-0001-4001-8001-000000000002.png">    </p:cNvPr>
+          <p:cNvPicPr>
+            <a:picLocks noChangeAspect="1"/>
+          </p:cNvPicPr>
+          <p:nvPr/>
+        </p:nvPicPr>
+        <p:blipFill>
+          <a:blip r:embed="rId2"/>
+          <a:srcRect l="0" r="0" t="0" b="0"/>
+          <a:stretch/>
+        </p:blipFill>
+        <p:spPr>
+          <a:xfrm>
+            <a:off x="2634615" y="1474470"/>
+            <a:ext cx="1880235" cy="1251852"/>
+          </a:xfrm>
+          <a:prstGeom prst="rect">
+            <a:avLst/>
+          </a:prstGeom>
+        </p:spPr>
+      </p:pic>
+      <p:sp>
+        <p:nvSpPr>
+          <p:cNvPr id="8" name="Shape 4"/>
+          <p:cNvSpPr/>
+          <p:nvPr/>
+        </p:nvSpPr>
+        <p:spPr>
+          <a:xfrm>
+            <a:off x="4514850" y="2284438"/>
+            <a:ext cx="114300" cy="256032"/>
+          </a:xfrm>
+          <a:prstGeom prst="rect">
+            <a:avLst/>
+          </a:prstGeom>
+          <a:solidFill>
+            <a:srgbClr val="FFFFFF"/>
+          </a:solidFill>
+          <a:ln w="12700">
+            <a:solidFill>
+              <a:srgbClr val="D9D5CF"/>
+            </a:solidFill>
+            <a:prstDash val="solid"/>
+          </a:ln>
+        </p:spPr>
+      </p:sp>
+      <p:pic>
+        <p:nvPicPr>
+          <p:cNvPr id="9" name="Image 2" descr="C:\Users\navib\Desktop\development\Archium-Agent\tests\benchmark\architectural_slides\case_010_construction_phases\assets\c0100003-0001-4001-8001-000000000003.png">    </p:cNvPr>
+          <p:cNvPicPr>
+            <a:picLocks noChangeAspect="1"/>
+          </p:cNvPicPr>
+          <p:nvPr/>
+        </p:nvPicPr>
+        <p:blipFill>
+          <a:blip r:embed="rId3"/>
+          <a:srcRect l="0" r="0" t="0" b="0"/>
+          <a:stretch/>
+        </p:blipFill>
+        <p:spPr>
+          <a:xfrm>
+            <a:off x="4629150" y="1474470"/>
+            <a:ext cx="1880235" cy="1251852"/>
+          </a:xfrm>
+          <a:prstGeom prst="rect">
+            <a:avLst/>
+          </a:prstGeom>
+        </p:spPr>
+      </p:pic>
+      <p:sp>
+        <p:nvSpPr>
+          <p:cNvPr id="10" name="Shape 5"/>
+          <p:cNvSpPr/>
+          <p:nvPr/>
+        </p:nvSpPr>
+        <p:spPr>
+          <a:xfrm>
+            <a:off x="6509385" y="2284438"/>
+            <a:ext cx="114300" cy="256032"/>
+          </a:xfrm>
+          <a:prstGeom prst="rect">
+            <a:avLst/>
+          </a:prstGeom>
+          <a:solidFill>
+            <a:srgbClr val="FFFFFF"/>
+          </a:solidFill>
+          <a:ln w="12700">
+            <a:solidFill>
+              <a:srgbClr val="D9D5CF"/>
+            </a:solidFill>
+            <a:prstDash val="solid"/>
+          </a:ln>
+        </p:spPr>
+      </p:sp>
+      <p:sp>
+        <p:nvSpPr>
+          <p:cNvPr id="11" name="Shape 6"/>
+          <p:cNvSpPr/>
+          <p:nvPr/>
+        </p:nvSpPr>
+        <p:spPr>
+          <a:xfrm>
+            <a:off x="6623685" y="1474470"/>
+            <a:ext cx="1880235" cy="2314194"/>
+          </a:xfrm>
+          <a:prstGeom prst="rect">
+            <a:avLst/>
+          </a:prstGeom>
+          <a:solidFill>
+            <a:srgbClr val="FFFFFF"/>
+          </a:solidFill>
+          <a:ln w="10160">
+            <a:solidFill>
+              <a:srgbClr val="D9D5CF"/>
+            </a:solidFill>
+            <a:prstDash val="solid"/>
+          </a:ln>
+        </p:spPr>
+      </p:sp>
+      <p:sp>
+        <p:nvSpPr>
+          <p:cNvPr id="12" name="Text 7"/>
+          <p:cNvSpPr/>
+          <p:nvPr/>
+        </p:nvSpPr>
+        <p:spPr>
+          <a:xfrm>
+            <a:off x="640080" y="3826764"/>
+            <a:ext cx="7863840" cy="292608"/>
+          </a:xfrm>
+          <a:prstGeom prst="rect">
+            <a:avLst/>
+          </a:prstGeom>
+          <a:noFill/>
+          <a:ln/>
+        </p:spPr>
+        <p:txBody>
+          <a:bodyPr wrap="square" rtlCol="0" anchor="t"/>
+          <a:lstStyle/>
+          <a:p>
+            <a:pPr algn="l" indent="0" marL="0">
+              <a:buNone/>
+            </a:pPr>
+            <a:r>
+              <a:rPr lang="en-US" sz="1200" dirty="0">
+                <a:solidFill>
+                  <a:srgbClr val="777777"/>
+                </a:solidFill>
+                <a:latin typeface="Microsoft YaHei" pitchFamily="34" charset="0"/>
+                <a:ea typeface="Microsoft YaHei" pitchFamily="34" charset="-122"/>
+                <a:cs typeface="Microsoft YaHei" pitchFamily="34" charset="-120"/>
+              </a:rPr>
+              <a:t>总结：一期保障急诊不停运，二期完成门诊更新，三期整合科研与后勤。</a:t>
+            </a:r>
+            <a:endParaRPr lang="en-US" sz="1200" dirty="0"/>
+          </a:p>
+        </p:txBody>
+      </p:sp>
+      <p:sp>
+        <p:nvSpPr>
+          <p:cNvPr id="13" name="Text 8"/>
+          <p:cNvSpPr/>
+          <p:nvPr/>
+        </p:nvSpPr>
+        <p:spPr>
+          <a:xfrm>
+            <a:off x="640080" y="4530852"/>
+            <a:ext cx="5504688" cy="201168"/>
+          </a:xfrm>
+          <a:prstGeom prst="rect">
+            <a:avLst/>
+          </a:prstGeom>
+          <a:noFill/>
+          <a:ln/>
+        </p:spPr>
+        <p:txBody>
+          <a:bodyPr wrap="square" rtlCol="0" anchor="t"/>
+          <a:lstStyle/>
+          <a:p>
+            <a:pPr algn="l" indent="0" marL="0">
+              <a:buNone/>
+            </a:pPr>
+            <a:r>
+              <a:rPr lang="en-US" sz="800" dirty="0">
+                <a:solidFill>
+                  <a:srgbClr val="777777"/>
+                </a:solidFill>
+                <a:latin typeface="Microsoft YaHei" pitchFamily="34" charset="0"/>
+                <a:ea typeface="Microsoft YaHei" pitchFamily="34" charset="-122"/>
+                <a:cs typeface="Microsoft YaHei" pitchFamily="34" charset="-120"/>
+              </a:rPr>
+              <a:t>实施策划.pdf p.9</a:t>
+            </a:r>
+            <a:endParaRPr lang="en-US" sz="800" dirty="0"/>
+          </a:p>
+        </p:txBody>
+      </p:sp>
+      <p:sp>
+        <p:nvSpPr>
+          <p:cNvPr id="14" name="Shape 9"/>
+          <p:cNvSpPr/>
+          <p:nvPr/>
+        </p:nvSpPr>
+        <p:spPr>
+          <a:xfrm>
+            <a:off x="6699885" y="1550670"/>
+            <a:ext cx="128016" cy="128016"/>
+          </a:xfrm>
+          <a:prstGeom prst="rect">
+            <a:avLst/>
+          </a:prstGeom>
+          <a:solidFill>
+            <a:srgbClr val="8B4513"/>
+          </a:solidFill>
+          <a:ln w="12700">
+            <a:solidFill>
+              <a:srgbClr val="8B4513"/>
+            </a:solidFill>
+            <a:prstDash val="solid"/>
+          </a:ln>
+        </p:spPr>
+      </p:sp>
+      <p:sp>
+        <p:nvSpPr>
+          <p:cNvPr id="15" name="Text 10"/>
+          <p:cNvSpPr/>
+          <p:nvPr/>
+        </p:nvSpPr>
+        <p:spPr>
+          <a:xfrm>
+            <a:off x="640080" y="2764422"/>
+            <a:ext cx="1880235" cy="1024242"/>
           </a:xfrm>
           <a:prstGeom prst="rect">
             <a:avLst/>
@@ -1043,62 +1317,14 @@
       </p:sp>
       <p:sp>
         <p:nvSpPr>
-          <p:cNvPr id="6" name="Shape 3"/>
+          <p:cNvPr id="16" name="Text 11"/>
           <p:cNvSpPr/>
           <p:nvPr/>
         </p:nvSpPr>
         <p:spPr>
           <a:xfrm>
-            <a:off x="2520315" y="2271065"/>
-            <a:ext cx="114300" cy="256032"/>
-          </a:xfrm>
-          <a:prstGeom prst="rect">
-            <a:avLst/>
-          </a:prstGeom>
-          <a:solidFill>
-            <a:srgbClr val="FFFFFF"/>
-          </a:solidFill>
-          <a:ln w="12700">
-            <a:solidFill>
-              <a:srgbClr val="D9D5CF"/>
-            </a:solidFill>
-            <a:prstDash val="solid"/>
-          </a:ln>
-        </p:spPr>
-      </p:sp>
-      <p:pic>
-        <p:nvPicPr>
-          <p:cNvPr id="7" name="Image 1" descr="C:\Users\navib\Desktop\development\Archium-Agent\tests\benchmark\architectural_slides\case_010_construction_phases\assets\c0100002-0001-4001-8001-000000000002.png">    </p:cNvPr>
-          <p:cNvPicPr>
-            <a:picLocks noChangeAspect="1"/>
-          </p:cNvPicPr>
-          <p:nvPr/>
-        </p:nvPicPr>
-        <p:blipFill>
-          <a:blip r:embed="rId2"/>
-          <a:srcRect l="0" r="0" t="0" b="0"/>
-          <a:stretch/>
-        </p:blipFill>
-        <p:spPr>
-          <a:xfrm>
-            <a:off x="2634615" y="1453896"/>
-            <a:ext cx="1880235" cy="1263167"/>
-          </a:xfrm>
-          <a:prstGeom prst="rect">
-            <a:avLst/>
-          </a:prstGeom>
-        </p:spPr>
-      </p:pic>
-      <p:sp>
-        <p:nvSpPr>
-          <p:cNvPr id="8" name="Text 4"/>
-          <p:cNvSpPr/>
-          <p:nvPr/>
-        </p:nvSpPr>
-        <p:spPr>
-          <a:xfrm>
-            <a:off x="2634615" y="2755163"/>
-            <a:ext cx="1880235" cy="1033501"/>
+            <a:off x="2634615" y="2764422"/>
+            <a:ext cx="1880235" cy="1024242"/>
           </a:xfrm>
           <a:prstGeom prst="rect">
             <a:avLst/>
@@ -1130,62 +1356,14 @@
       </p:sp>
       <p:sp>
         <p:nvSpPr>
-          <p:cNvPr id="9" name="Shape 5"/>
+          <p:cNvPr id="17" name="Text 12"/>
           <p:cNvSpPr/>
           <p:nvPr/>
         </p:nvSpPr>
         <p:spPr>
           <a:xfrm>
-            <a:off x="4514850" y="2271065"/>
-            <a:ext cx="114300" cy="256032"/>
-          </a:xfrm>
-          <a:prstGeom prst="rect">
-            <a:avLst/>
-          </a:prstGeom>
-          <a:solidFill>
-            <a:srgbClr val="FFFFFF"/>
-          </a:solidFill>
-          <a:ln w="12700">
-            <a:solidFill>
-              <a:srgbClr val="D9D5CF"/>
-            </a:solidFill>
-            <a:prstDash val="solid"/>
-          </a:ln>
-        </p:spPr>
-      </p:sp>
-      <p:pic>
-        <p:nvPicPr>
-          <p:cNvPr id="10" name="Image 2" descr="C:\Users\navib\Desktop\development\Archium-Agent\tests\benchmark\architectural_slides\case_010_construction_phases\assets\c0100003-0001-4001-8001-000000000003.png">    </p:cNvPr>
-          <p:cNvPicPr>
-            <a:picLocks noChangeAspect="1"/>
-          </p:cNvPicPr>
-          <p:nvPr/>
-        </p:nvPicPr>
-        <p:blipFill>
-          <a:blip r:embed="rId3"/>
-          <a:srcRect l="0" r="0" t="0" b="0"/>
-          <a:stretch/>
-        </p:blipFill>
-        <p:spPr>
-          <a:xfrm>
-            <a:off x="4629150" y="1453896"/>
-            <a:ext cx="1880235" cy="1263167"/>
-          </a:xfrm>
-          <a:prstGeom prst="rect">
-            <a:avLst/>
-          </a:prstGeom>
-        </p:spPr>
-      </p:pic>
-      <p:sp>
-        <p:nvSpPr>
-          <p:cNvPr id="11" name="Text 6"/>
-          <p:cNvSpPr/>
-          <p:nvPr/>
-        </p:nvSpPr>
-        <p:spPr>
-          <a:xfrm>
-            <a:off x="4629150" y="2755163"/>
-            <a:ext cx="1880235" cy="1033501"/>
+            <a:off x="4629150" y="2764422"/>
+            <a:ext cx="1880235" cy="1024242"/>
           </a:xfrm>
           <a:prstGeom prst="rect">
             <a:avLst/>
@@ -1217,39 +1395,14 @@
       </p:sp>
       <p:sp>
         <p:nvSpPr>
-          <p:cNvPr id="12" name="Shape 7"/>
+          <p:cNvPr id="18" name="Text 13"/>
           <p:cNvSpPr/>
           <p:nvPr/>
         </p:nvSpPr>
         <p:spPr>
           <a:xfrm>
-            <a:off x="6509385" y="2271065"/>
-            <a:ext cx="114300" cy="256032"/>
-          </a:xfrm>
-          <a:prstGeom prst="rect">
-            <a:avLst/>
-          </a:prstGeom>
-          <a:solidFill>
-            <a:srgbClr val="FFFFFF"/>
-          </a:solidFill>
-          <a:ln w="12700">
-            <a:solidFill>
-              <a:srgbClr val="D9D5CF"/>
-            </a:solidFill>
-            <a:prstDash val="solid"/>
-          </a:ln>
-        </p:spPr>
-      </p:sp>
-      <p:sp>
-        <p:nvSpPr>
-          <p:cNvPr id="13" name="Text 8"/>
-          <p:cNvSpPr/>
-          <p:nvPr/>
-        </p:nvSpPr>
-        <p:spPr>
-          <a:xfrm>
-            <a:off x="6623685" y="1453896"/>
-            <a:ext cx="1880235" cy="2334768"/>
+            <a:off x="6776085" y="2261296"/>
+            <a:ext cx="1651635" cy="647974"/>
           </a:xfrm>
           <a:prstGeom prst="rect">
             <a:avLst/>
@@ -1276,84 +1429,6 @@
               <a:t>4. 全程运维过渡</a:t>
             </a:r>
             <a:endParaRPr lang="en-US" sz="1600" dirty="0"/>
-          </a:p>
-        </p:txBody>
-      </p:sp>
-      <p:sp>
-        <p:nvSpPr>
-          <p:cNvPr id="14" name="Text 9"/>
-          <p:cNvSpPr/>
-          <p:nvPr/>
-        </p:nvSpPr>
-        <p:spPr>
-          <a:xfrm>
-            <a:off x="640080" y="3826764"/>
-            <a:ext cx="7863840" cy="292608"/>
-          </a:xfrm>
-          <a:prstGeom prst="rect">
-            <a:avLst/>
-          </a:prstGeom>
-          <a:noFill/>
-          <a:ln/>
-        </p:spPr>
-        <p:txBody>
-          <a:bodyPr wrap="square" rtlCol="0" anchor="t"/>
-          <a:lstStyle/>
-          <a:p>
-            <a:pPr algn="l" indent="0" marL="0">
-              <a:buNone/>
-            </a:pPr>
-            <a:r>
-              <a:rPr lang="en-US" sz="1200" dirty="0">
-                <a:solidFill>
-                  <a:srgbClr val="777777"/>
-                </a:solidFill>
-                <a:latin typeface="Microsoft YaHei" pitchFamily="34" charset="0"/>
-                <a:ea typeface="Microsoft YaHei" pitchFamily="34" charset="-122"/>
-                <a:cs typeface="Microsoft YaHei" pitchFamily="34" charset="-120"/>
-              </a:rPr>
-              <a:t>总结：一期保障急诊不停运，二期完成门诊更新，三期整合科研与后勤。</a:t>
-            </a:r>
-            <a:endParaRPr lang="en-US" sz="1200" dirty="0"/>
-          </a:p>
-        </p:txBody>
-      </p:sp>
-      <p:sp>
-        <p:nvSpPr>
-          <p:cNvPr id="15" name="Text 10"/>
-          <p:cNvSpPr/>
-          <p:nvPr/>
-        </p:nvSpPr>
-        <p:spPr>
-          <a:xfrm>
-            <a:off x="640080" y="4530852"/>
-            <a:ext cx="5504688" cy="201168"/>
-          </a:xfrm>
-          <a:prstGeom prst="rect">
-            <a:avLst/>
-          </a:prstGeom>
-          <a:noFill/>
-          <a:ln/>
-        </p:spPr>
-        <p:txBody>
-          <a:bodyPr wrap="square" rtlCol="0" anchor="t"/>
-          <a:lstStyle/>
-          <a:p>
-            <a:pPr algn="l" indent="0" marL="0">
-              <a:buNone/>
-            </a:pPr>
-            <a:r>
-              <a:rPr lang="en-US" sz="800" dirty="0">
-                <a:solidFill>
-                  <a:srgbClr val="777777"/>
-                </a:solidFill>
-                <a:latin typeface="Microsoft YaHei" pitchFamily="34" charset="0"/>
-                <a:ea typeface="Microsoft YaHei" pitchFamily="34" charset="-122"/>
-                <a:cs typeface="Microsoft YaHei" pitchFamily="34" charset="-120"/>
-              </a:rPr>
-              <a:t>实施策划.pdf p.9</a:t>
-            </a:r>
-            <a:endParaRPr lang="en-US" sz="800" dirty="0"/>
           </a:p>
         </p:txBody>
       </p:sp>

--- a/tests/benchmark/architectural_slides/case_010_construction_phases/output.pptx
+++ b/tests/benchmark/architectural_slides/case_010_construction_phases/output.pptx
@@ -910,7 +910,7 @@
         <p:spPr>
           <a:xfrm>
             <a:off x="640080" y="411480"/>
-            <a:ext cx="7863840" cy="621792"/>
+            <a:ext cx="7863840" cy="601218"/>
           </a:xfrm>
           <a:prstGeom prst="rect">
             <a:avLst/>
@@ -948,7 +948,7 @@
         </p:nvSpPr>
         <p:spPr>
           <a:xfrm>
-            <a:off x="640080" y="1071372"/>
+            <a:off x="640080" y="1050798"/>
             <a:ext cx="7863840" cy="326898"/>
           </a:xfrm>
           <a:prstGeom prst="rect">
@@ -987,7 +987,7 @@
         </p:nvSpPr>
         <p:spPr>
           <a:xfrm>
-            <a:off x="1580198" y="1752173"/>
+            <a:off x="1580198" y="1734068"/>
             <a:ext cx="5983605" cy="32004"/>
           </a:xfrm>
           <a:prstGeom prst="rect">
@@ -1019,8 +1019,8 @@
         </p:blipFill>
         <p:spPr>
           <a:xfrm>
-            <a:off x="640080" y="1474470"/>
-            <a:ext cx="1880235" cy="1251852"/>
+            <a:off x="640080" y="1453896"/>
+            <a:ext cx="1880235" cy="1263167"/>
           </a:xfrm>
           <a:prstGeom prst="rect">
             <a:avLst/>
@@ -1035,7 +1035,7 @@
         </p:nvSpPr>
         <p:spPr>
           <a:xfrm>
-            <a:off x="2520315" y="2284438"/>
+            <a:off x="2520315" y="2271065"/>
             <a:ext cx="114300" cy="256032"/>
           </a:xfrm>
           <a:prstGeom prst="rect">
@@ -1067,8 +1067,8 @@
         </p:blipFill>
         <p:spPr>
           <a:xfrm>
-            <a:off x="2634615" y="1474470"/>
-            <a:ext cx="1880235" cy="1251852"/>
+            <a:off x="2634615" y="1453896"/>
+            <a:ext cx="1880235" cy="1263167"/>
           </a:xfrm>
           <a:prstGeom prst="rect">
             <a:avLst/>
@@ -1083,7 +1083,7 @@
         </p:nvSpPr>
         <p:spPr>
           <a:xfrm>
-            <a:off x="4514850" y="2284438"/>
+            <a:off x="4514850" y="2271065"/>
             <a:ext cx="114300" cy="256032"/>
           </a:xfrm>
           <a:prstGeom prst="rect">
@@ -1115,8 +1115,8 @@
         </p:blipFill>
         <p:spPr>
           <a:xfrm>
-            <a:off x="4629150" y="1474470"/>
-            <a:ext cx="1880235" cy="1251852"/>
+            <a:off x="4629150" y="1453896"/>
+            <a:ext cx="1880235" cy="1263167"/>
           </a:xfrm>
           <a:prstGeom prst="rect">
             <a:avLst/>
@@ -1131,7 +1131,7 @@
         </p:nvSpPr>
         <p:spPr>
           <a:xfrm>
-            <a:off x="6509385" y="2284438"/>
+            <a:off x="6509385" y="2271065"/>
             <a:ext cx="114300" cy="256032"/>
           </a:xfrm>
           <a:prstGeom prst="rect">
@@ -1156,8 +1156,8 @@
         </p:nvSpPr>
         <p:spPr>
           <a:xfrm>
-            <a:off x="6623685" y="1474470"/>
-            <a:ext cx="1880235" cy="2314194"/>
+            <a:off x="6623685" y="1453896"/>
+            <a:ext cx="1880235" cy="2334768"/>
           </a:xfrm>
           <a:prstGeom prst="rect">
             <a:avLst/>
@@ -1259,7 +1259,7 @@
         </p:nvSpPr>
         <p:spPr>
           <a:xfrm>
-            <a:off x="6699885" y="1550670"/>
+            <a:off x="6699885" y="1530096"/>
             <a:ext cx="128016" cy="128016"/>
           </a:xfrm>
           <a:prstGeom prst="rect">
@@ -1284,8 +1284,8 @@
         </p:nvSpPr>
         <p:spPr>
           <a:xfrm>
-            <a:off x="640080" y="2764422"/>
-            <a:ext cx="1880235" cy="1024242"/>
+            <a:off x="640080" y="2755163"/>
+            <a:ext cx="1880235" cy="1033501"/>
           </a:xfrm>
           <a:prstGeom prst="rect">
             <a:avLst/>
@@ -1323,8 +1323,8 @@
         </p:nvSpPr>
         <p:spPr>
           <a:xfrm>
-            <a:off x="2634615" y="2764422"/>
-            <a:ext cx="1880235" cy="1024242"/>
+            <a:off x="2634615" y="2755163"/>
+            <a:ext cx="1880235" cy="1033501"/>
           </a:xfrm>
           <a:prstGeom prst="rect">
             <a:avLst/>
@@ -1362,8 +1362,8 @@
         </p:nvSpPr>
         <p:spPr>
           <a:xfrm>
-            <a:off x="4629150" y="2764422"/>
-            <a:ext cx="1880235" cy="1024242"/>
+            <a:off x="4629150" y="2755163"/>
+            <a:ext cx="1880235" cy="1033501"/>
           </a:xfrm>
           <a:prstGeom prst="rect">
             <a:avLst/>
@@ -1401,8 +1401,8 @@
         </p:nvSpPr>
         <p:spPr>
           <a:xfrm>
-            <a:off x="6776085" y="2261296"/>
-            <a:ext cx="1651635" cy="647974"/>
+            <a:off x="6776085" y="2247717"/>
+            <a:ext cx="1651635" cy="653735"/>
           </a:xfrm>
           <a:prstGeom prst="rect">
             <a:avLst/>
